--- a/docs/Beytak-Deck.pptx
+++ b/docs/Beytak-Deck.pptx
@@ -1498,60 +1498,18 @@
       </p:sp>
       <p:sp>
         <p:nvSpPr>
-          <p:cNvPr id="5" name="Text 3"/>
-          <p:cNvSpPr/>
-          <p:nvPr/>
-        </p:nvSpPr>
-        <p:spPr>
-          <a:xfrm>
-            <a:off x="566928" y="1517904"/>
-            <a:ext cx="11064240" cy="786384"/>
-          </a:xfrm>
-          <a:prstGeom prst="rect">
-            <a:avLst/>
-          </a:prstGeom>
-          <a:noFill/>
-          <a:ln/>
-        </p:spPr>
-        <p:txBody>
-          <a:bodyPr wrap="square" rtlCol="0" anchor="t"/>
-          <a:lstStyle/>
-          <a:p>
-            <a:pPr indent="0" marL="0">
-              <a:lnSpc>
-                <a:spcPct val="130000"/>
-              </a:lnSpc>
-              <a:buNone/>
-            </a:pPr>
-            <a:r>
-              <a:rPr lang="en-US" sz="1350" dirty="0">
-                <a:solidFill>
-                  <a:srgbClr val="1F2328"/>
-                </a:solidFill>
-                <a:latin typeface="Segoe UI" pitchFamily="34" charset="0"/>
-                <a:ea typeface="Segoe UI" pitchFamily="34" charset="-122"/>
-                <a:cs typeface="Segoe UI" pitchFamily="34" charset="-120"/>
-              </a:rPr>
-              <a:t>Beytak — Arabic for “your home” — is a rental marketplace for the Jordanian market. Owners publish apartments, houses, villas, studios and rooms; renters filter by city and specification, see genuine availability, and reserve for a defined period. One unified booking model covers a one-week stay and a one-year lease alike.</a:t>
-            </a:r>
-            <a:endParaRPr lang="en-US" sz="1350" dirty="0"/>
-          </a:p>
-        </p:txBody>
-      </p:sp>
-      <p:sp>
-        <p:nvSpPr>
-          <p:cNvPr id="6" name="Shape 4"/>
-          <p:cNvSpPr/>
-          <p:nvPr/>
-        </p:nvSpPr>
-        <p:spPr>
-          <a:xfrm>
-            <a:off x="566928" y="2514600"/>
-            <a:ext cx="3520440" cy="2487168"/>
+          <p:cNvPr id="5" name="Shape 3"/>
+          <p:cNvSpPr/>
+          <p:nvPr/>
+        </p:nvSpPr>
+        <p:spPr>
+          <a:xfrm>
+            <a:off x="566928" y="1783080"/>
+            <a:ext cx="3520440" cy="3182112"/>
           </a:xfrm>
           <a:prstGeom prst="roundRect">
             <a:avLst>
-              <a:gd name="adj" fmla="val 2206"/>
+              <a:gd name="adj" fmla="val 1724"/>
             </a:avLst>
           </a:prstGeom>
           <a:solidFill>
@@ -1567,13 +1525,13 @@
       </p:sp>
       <p:sp>
         <p:nvSpPr>
-          <p:cNvPr id="7" name="Text 5"/>
-          <p:cNvSpPr/>
-          <p:nvPr/>
-        </p:nvSpPr>
-        <p:spPr>
-          <a:xfrm>
-            <a:off x="749808" y="2660904"/>
+          <p:cNvPr id="6" name="Text 4"/>
+          <p:cNvSpPr/>
+          <p:nvPr/>
+        </p:nvSpPr>
+        <p:spPr>
+          <a:xfrm>
+            <a:off x="749808" y="1929384"/>
             <a:ext cx="3154680" cy="201168"/>
           </a:xfrm>
           <a:prstGeom prst="rect">
@@ -1606,34 +1564,34 @@
       </p:sp>
       <p:sp>
         <p:nvSpPr>
-          <p:cNvPr id="8" name="Text 6"/>
-          <p:cNvSpPr/>
-          <p:nvPr/>
-        </p:nvSpPr>
-        <p:spPr>
-          <a:xfrm>
-            <a:off x="749808" y="2916936"/>
-            <a:ext cx="3154680" cy="1938528"/>
-          </a:xfrm>
-          <a:prstGeom prst="rect">
-            <a:avLst/>
-          </a:prstGeom>
-          <a:noFill/>
-          <a:ln/>
-        </p:spPr>
-        <p:txBody>
-          <a:bodyPr wrap="square" rtlCol="0" anchor="t"/>
+          <p:cNvPr id="7" name="Text 5"/>
+          <p:cNvSpPr/>
+          <p:nvPr/>
+        </p:nvSpPr>
+        <p:spPr>
+          <a:xfrm>
+            <a:off x="749808" y="2258568"/>
+            <a:ext cx="3154680" cy="2523744"/>
+          </a:xfrm>
+          <a:prstGeom prst="rect">
+            <a:avLst/>
+          </a:prstGeom>
+          <a:noFill/>
+          <a:ln/>
+        </p:spPr>
+        <p:txBody>
+          <a:bodyPr wrap="square" rtlCol="0" anchor="ctr"/>
           <a:lstStyle/>
           <a:p>
             <a:pPr marL="139700" indent="-139700">
               <a:lnSpc>
-                <a:spcPct val="118000"/>
+                <a:spcPct val="150000"/>
               </a:lnSpc>
               <a:buSzPct val="100000"/>
               <a:buChar char="•"/>
             </a:pPr>
             <a:r>
-              <a:rPr lang="en-US" sz="1050" dirty="0">
+              <a:rPr lang="en-US" sz="1350" dirty="0">
                 <a:solidFill>
                   <a:srgbClr val="1F2328"/>
                 </a:solidFill>
@@ -1641,20 +1599,20 @@
                 <a:ea typeface="Segoe UI" pitchFamily="34" charset="-122"/>
                 <a:cs typeface="Segoe UI" pitchFamily="34" charset="-120"/>
               </a:rPr>
-              <a:t>Filter by city, type, period, beds, price and furnishing</a:t>
-            </a:r>
-            <a:endParaRPr lang="en-US" sz="1050" dirty="0"/>
+              <a:t>Filter by city, type and price</a:t>
+            </a:r>
+            <a:endParaRPr lang="en-US" sz="1350" dirty="0"/>
           </a:p>
           <a:p>
             <a:pPr marL="139700" indent="-139700">
               <a:lnSpc>
-                <a:spcPct val="118000"/>
+                <a:spcPct val="150000"/>
               </a:lnSpc>
               <a:buSzPct val="100000"/>
               <a:buChar char="•"/>
             </a:pPr>
             <a:r>
-              <a:rPr lang="en-US" sz="1050" dirty="0">
+              <a:rPr lang="en-US" sz="1350" dirty="0">
                 <a:solidFill>
                   <a:srgbClr val="1F2328"/>
                 </a:solidFill>
@@ -1662,20 +1620,20 @@
                 <a:ea typeface="Segoe UI" pitchFamily="34" charset="-122"/>
                 <a:cs typeface="Segoe UI" pitchFamily="34" charset="-120"/>
               </a:rPr>
-              <a:t>See an availability calendar before choosing dates</a:t>
-            </a:r>
-            <a:endParaRPr lang="en-US" sz="1050" dirty="0"/>
+              <a:t>See real availability</a:t>
+            </a:r>
+            <a:endParaRPr lang="en-US" sz="1350" dirty="0"/>
           </a:p>
           <a:p>
             <a:pPr marL="139700" indent="-139700">
               <a:lnSpc>
-                <a:spcPct val="118000"/>
+                <a:spcPct val="150000"/>
               </a:lnSpc>
               <a:buSzPct val="100000"/>
               <a:buChar char="•"/>
             </a:pPr>
             <a:r>
-              <a:rPr lang="en-US" sz="1050" dirty="0">
+              <a:rPr lang="en-US" sz="1350" dirty="0">
                 <a:solidFill>
                   <a:srgbClr val="1F2328"/>
                 </a:solidFill>
@@ -1683,47 +1641,26 @@
                 <a:ea typeface="Segoe UI" pitchFamily="34" charset="-122"/>
                 <a:cs typeface="Segoe UI" pitchFamily="34" charset="-120"/>
               </a:rPr>
-              <a:t>Request a booking; save properties to a shortlist</a:t>
-            </a:r>
-            <a:endParaRPr lang="en-US" sz="1050" dirty="0"/>
-          </a:p>
-          <a:p>
-            <a:pPr marL="139700" indent="-139700">
-              <a:lnSpc>
-                <a:spcPct val="118000"/>
-              </a:lnSpc>
-              <a:buSzPct val="100000"/>
-              <a:buChar char="•"/>
-            </a:pPr>
-            <a:r>
-              <a:rPr lang="en-US" sz="1050" dirty="0">
-                <a:solidFill>
-                  <a:srgbClr val="1F2328"/>
-                </a:solidFill>
-                <a:latin typeface="Segoe UI" pitchFamily="34" charset="0"/>
-                <a:ea typeface="Segoe UI" pitchFamily="34" charset="-122"/>
-                <a:cs typeface="Segoe UI" pitchFamily="34" charset="-120"/>
-              </a:rPr>
-              <a:t>Record a payment against a confirmed booking</a:t>
-            </a:r>
-            <a:endParaRPr lang="en-US" sz="1050" dirty="0"/>
-          </a:p>
-        </p:txBody>
-      </p:sp>
-      <p:sp>
-        <p:nvSpPr>
-          <p:cNvPr id="9" name="Shape 7"/>
-          <p:cNvSpPr/>
-          <p:nvPr/>
-        </p:nvSpPr>
-        <p:spPr>
-          <a:xfrm>
-            <a:off x="4343400" y="2514600"/>
-            <a:ext cx="3520440" cy="2487168"/>
+              <a:t>Book, save and pay</a:t>
+            </a:r>
+            <a:endParaRPr lang="en-US" sz="1350" dirty="0"/>
+          </a:p>
+        </p:txBody>
+      </p:sp>
+      <p:sp>
+        <p:nvSpPr>
+          <p:cNvPr id="8" name="Shape 6"/>
+          <p:cNvSpPr/>
+          <p:nvPr/>
+        </p:nvSpPr>
+        <p:spPr>
+          <a:xfrm>
+            <a:off x="4343400" y="1783080"/>
+            <a:ext cx="3520440" cy="3182112"/>
           </a:xfrm>
           <a:prstGeom prst="roundRect">
             <a:avLst>
-              <a:gd name="adj" fmla="val 2206"/>
+              <a:gd name="adj" fmla="val 1724"/>
             </a:avLst>
           </a:prstGeom>
           <a:solidFill>
@@ -1739,13 +1676,13 @@
       </p:sp>
       <p:sp>
         <p:nvSpPr>
-          <p:cNvPr id="10" name="Text 8"/>
-          <p:cNvSpPr/>
-          <p:nvPr/>
-        </p:nvSpPr>
-        <p:spPr>
-          <a:xfrm>
-            <a:off x="4526280" y="2660904"/>
+          <p:cNvPr id="9" name="Text 7"/>
+          <p:cNvSpPr/>
+          <p:nvPr/>
+        </p:nvSpPr>
+        <p:spPr>
+          <a:xfrm>
+            <a:off x="4526280" y="1929384"/>
             <a:ext cx="3154680" cy="201168"/>
           </a:xfrm>
           <a:prstGeom prst="rect">
@@ -1778,34 +1715,34 @@
       </p:sp>
       <p:sp>
         <p:nvSpPr>
-          <p:cNvPr id="11" name="Text 9"/>
-          <p:cNvSpPr/>
-          <p:nvPr/>
-        </p:nvSpPr>
-        <p:spPr>
-          <a:xfrm>
-            <a:off x="4526280" y="2916936"/>
-            <a:ext cx="3154680" cy="1938528"/>
-          </a:xfrm>
-          <a:prstGeom prst="rect">
-            <a:avLst/>
-          </a:prstGeom>
-          <a:noFill/>
-          <a:ln/>
-        </p:spPr>
-        <p:txBody>
-          <a:bodyPr wrap="square" rtlCol="0" anchor="t"/>
+          <p:cNvPr id="10" name="Text 8"/>
+          <p:cNvSpPr/>
+          <p:nvPr/>
+        </p:nvSpPr>
+        <p:spPr>
+          <a:xfrm>
+            <a:off x="4526280" y="2258568"/>
+            <a:ext cx="3154680" cy="2523744"/>
+          </a:xfrm>
+          <a:prstGeom prst="rect">
+            <a:avLst/>
+          </a:prstGeom>
+          <a:noFill/>
+          <a:ln/>
+        </p:spPr>
+        <p:txBody>
+          <a:bodyPr wrap="square" rtlCol="0" anchor="ctr"/>
           <a:lstStyle/>
           <a:p>
             <a:pPr marL="139700" indent="-139700">
               <a:lnSpc>
-                <a:spcPct val="118000"/>
+                <a:spcPct val="150000"/>
               </a:lnSpc>
               <a:buSzPct val="100000"/>
               <a:buChar char="•"/>
             </a:pPr>
             <a:r>
-              <a:rPr lang="en-US" sz="1050" dirty="0">
+              <a:rPr lang="en-US" sz="1350" dirty="0">
                 <a:solidFill>
                   <a:srgbClr val="1F2328"/>
                 </a:solidFill>
@@ -1813,20 +1750,20 @@
                 <a:ea typeface="Segoe UI" pitchFamily="34" charset="-122"/>
                 <a:cs typeface="Segoe UI" pitchFamily="34" charset="-120"/>
               </a:rPr>
-              <a:t>Subscribe at 20 JOD a month — no commission taken</a:t>
-            </a:r>
-            <a:endParaRPr lang="en-US" sz="1050" dirty="0"/>
+              <a:t>20 JOD a month</a:t>
+            </a:r>
+            <a:endParaRPr lang="en-US" sz="1350" dirty="0"/>
           </a:p>
           <a:p>
             <a:pPr marL="139700" indent="-139700">
               <a:lnSpc>
-                <a:spcPct val="118000"/>
+                <a:spcPct val="150000"/>
               </a:lnSpc>
               <a:buSzPct val="100000"/>
               <a:buChar char="•"/>
             </a:pPr>
             <a:r>
-              <a:rPr lang="en-US" sz="1050" dirty="0">
+              <a:rPr lang="en-US" sz="1350" dirty="0">
                 <a:solidFill>
                   <a:srgbClr val="1F2328"/>
                 </a:solidFill>
@@ -1834,20 +1771,20 @@
                 <a:ea typeface="Segoe UI" pitchFamily="34" charset="-122"/>
                 <a:cs typeface="Segoe UI" pitchFamily="34" charset="-120"/>
               </a:rPr>
-              <a:t>Publish listings with a structured specification</a:t>
-            </a:r>
-            <a:endParaRPr lang="en-US" sz="1050" dirty="0"/>
+              <a:t>No commission</a:t>
+            </a:r>
+            <a:endParaRPr lang="en-US" sz="1350" dirty="0"/>
           </a:p>
           <a:p>
             <a:pPr marL="139700" indent="-139700">
               <a:lnSpc>
-                <a:spcPct val="118000"/>
+                <a:spcPct val="150000"/>
               </a:lnSpc>
               <a:buSzPct val="100000"/>
               <a:buChar char="•"/>
             </a:pPr>
             <a:r>
-              <a:rPr lang="en-US" sz="1050" dirty="0">
+              <a:rPr lang="en-US" sz="1350" dirty="0">
                 <a:solidFill>
                   <a:srgbClr val="1F2328"/>
                 </a:solidFill>
@@ -1855,47 +1792,26 @@
                 <a:ea typeface="Segoe UI" pitchFamily="34" charset="-122"/>
                 <a:cs typeface="Segoe UI" pitchFamily="34" charset="-120"/>
               </a:rPr>
-              <a:t>Review and confirm booking requests directly</a:t>
-            </a:r>
-            <a:endParaRPr lang="en-US" sz="1050" dirty="0"/>
-          </a:p>
-          <a:p>
-            <a:pPr marL="139700" indent="-139700">
-              <a:lnSpc>
-                <a:spcPct val="118000"/>
-              </a:lnSpc>
-              <a:buSzPct val="100000"/>
-              <a:buChar char="•"/>
-            </a:pPr>
-            <a:r>
-              <a:rPr lang="en-US" sz="1050" dirty="0">
-                <a:solidFill>
-                  <a:srgbClr val="1F2328"/>
-                </a:solidFill>
-                <a:latin typeface="Segoe UI" pitchFamily="34" charset="0"/>
-                <a:ea typeface="Segoe UI" pitchFamily="34" charset="-122"/>
-                <a:cs typeface="Segoe UI" pitchFamily="34" charset="-120"/>
-              </a:rPr>
-              <a:t>Delist a property without losing its booking history</a:t>
-            </a:r>
-            <a:endParaRPr lang="en-US" sz="1050" dirty="0"/>
-          </a:p>
-        </p:txBody>
-      </p:sp>
-      <p:sp>
-        <p:nvSpPr>
-          <p:cNvPr id="12" name="Shape 10"/>
-          <p:cNvSpPr/>
-          <p:nvPr/>
-        </p:nvSpPr>
-        <p:spPr>
-          <a:xfrm>
-            <a:off x="8119872" y="2514600"/>
-            <a:ext cx="3520440" cy="2487168"/>
+              <a:t>Confirm bookings directly</a:t>
+            </a:r>
+            <a:endParaRPr lang="en-US" sz="1350" dirty="0"/>
+          </a:p>
+        </p:txBody>
+      </p:sp>
+      <p:sp>
+        <p:nvSpPr>
+          <p:cNvPr id="11" name="Shape 9"/>
+          <p:cNvSpPr/>
+          <p:nvPr/>
+        </p:nvSpPr>
+        <p:spPr>
+          <a:xfrm>
+            <a:off x="8119872" y="1783080"/>
+            <a:ext cx="3520440" cy="3182112"/>
           </a:xfrm>
           <a:prstGeom prst="roundRect">
             <a:avLst>
-              <a:gd name="adj" fmla="val 2206"/>
+              <a:gd name="adj" fmla="val 1724"/>
             </a:avLst>
           </a:prstGeom>
           <a:solidFill>
@@ -1911,13 +1827,13 @@
       </p:sp>
       <p:sp>
         <p:nvSpPr>
-          <p:cNvPr id="13" name="Text 11"/>
-          <p:cNvSpPr/>
-          <p:nvPr/>
-        </p:nvSpPr>
-        <p:spPr>
-          <a:xfrm>
-            <a:off x="8302752" y="2660904"/>
+          <p:cNvPr id="12" name="Text 10"/>
+          <p:cNvSpPr/>
+          <p:nvPr/>
+        </p:nvSpPr>
+        <p:spPr>
+          <a:xfrm>
+            <a:off x="8302752" y="1929384"/>
             <a:ext cx="3154680" cy="201168"/>
           </a:xfrm>
           <a:prstGeom prst="rect">
@@ -1950,34 +1866,34 @@
       </p:sp>
       <p:sp>
         <p:nvSpPr>
-          <p:cNvPr id="14" name="Text 12"/>
-          <p:cNvSpPr/>
-          <p:nvPr/>
-        </p:nvSpPr>
-        <p:spPr>
-          <a:xfrm>
-            <a:off x="8302752" y="2916936"/>
-            <a:ext cx="3154680" cy="1938528"/>
-          </a:xfrm>
-          <a:prstGeom prst="rect">
-            <a:avLst/>
-          </a:prstGeom>
-          <a:noFill/>
-          <a:ln/>
-        </p:spPr>
-        <p:txBody>
-          <a:bodyPr wrap="square" rtlCol="0" anchor="t"/>
+          <p:cNvPr id="13" name="Text 11"/>
+          <p:cNvSpPr/>
+          <p:nvPr/>
+        </p:nvSpPr>
+        <p:spPr>
+          <a:xfrm>
+            <a:off x="8302752" y="2258568"/>
+            <a:ext cx="3154680" cy="2523744"/>
+          </a:xfrm>
+          <a:prstGeom prst="rect">
+            <a:avLst/>
+          </a:prstGeom>
+          <a:noFill/>
+          <a:ln/>
+        </p:spPr>
+        <p:txBody>
+          <a:bodyPr wrap="square" rtlCol="0" anchor="ctr"/>
           <a:lstStyle/>
           <a:p>
             <a:pPr marL="139700" indent="-139700">
               <a:lnSpc>
-                <a:spcPct val="118000"/>
+                <a:spcPct val="150000"/>
               </a:lnSpc>
               <a:buSzPct val="100000"/>
               <a:buChar char="•"/>
             </a:pPr>
             <a:r>
-              <a:rPr lang="en-US" sz="1050" dirty="0">
+              <a:rPr lang="en-US" sz="1350" dirty="0">
                 <a:solidFill>
                   <a:srgbClr val="1F2328"/>
                 </a:solidFill>
@@ -1985,20 +1901,20 @@
                 <a:ea typeface="Segoe UI" pitchFamily="34" charset="-122"/>
                 <a:cs typeface="Segoe UI" pitchFamily="34" charset="-120"/>
               </a:rPr>
-              <a:t>Moderate listings and testimonials</a:t>
-            </a:r>
-            <a:endParaRPr lang="en-US" sz="1050" dirty="0"/>
+              <a:t>Moderate listings</a:t>
+            </a:r>
+            <a:endParaRPr lang="en-US" sz="1350" dirty="0"/>
           </a:p>
           <a:p>
             <a:pPr marL="139700" indent="-139700">
               <a:lnSpc>
-                <a:spcPct val="118000"/>
+                <a:spcPct val="150000"/>
               </a:lnSpc>
               <a:buSzPct val="100000"/>
               <a:buChar char="•"/>
             </a:pPr>
             <a:r>
-              <a:rPr lang="en-US" sz="1050" dirty="0">
+              <a:rPr lang="en-US" sz="1350" dirty="0">
                 <a:solidFill>
                   <a:srgbClr val="1F2328"/>
                 </a:solidFill>
@@ -2006,20 +1922,20 @@
                 <a:ea typeface="Segoe UI" pitchFamily="34" charset="-122"/>
                 <a:cs typeface="Segoe UI" pitchFamily="34" charset="-120"/>
               </a:rPr>
-              <a:t>Review and activate subscription payments</a:t>
-            </a:r>
-            <a:endParaRPr lang="en-US" sz="1050" dirty="0"/>
+              <a:t>Activate subscriptions</a:t>
+            </a:r>
+            <a:endParaRPr lang="en-US" sz="1350" dirty="0"/>
           </a:p>
           <a:p>
             <a:pPr marL="139700" indent="-139700">
               <a:lnSpc>
-                <a:spcPct val="118000"/>
+                <a:spcPct val="150000"/>
               </a:lnSpc>
               <a:buSzPct val="100000"/>
               <a:buChar char="•"/>
             </a:pPr>
             <a:r>
-              <a:rPr lang="en-US" sz="1050" dirty="0">
+              <a:rPr lang="en-US" sz="1350" dirty="0">
                 <a:solidFill>
                   <a:srgbClr val="1F2328"/>
                 </a:solidFill>
@@ -2027,36 +1943,15 @@
                 <a:ea typeface="Segoe UI" pitchFamily="34" charset="-122"/>
                 <a:cs typeface="Segoe UI" pitchFamily="34" charset="-120"/>
               </a:rPr>
-              <a:t>Never in the critical path of a new listing</a:t>
-            </a:r>
-            <a:endParaRPr lang="en-US" sz="1050" dirty="0"/>
-          </a:p>
-          <a:p>
-            <a:pPr marL="139700" indent="-139700">
-              <a:lnSpc>
-                <a:spcPct val="118000"/>
-              </a:lnSpc>
-              <a:buSzPct val="100000"/>
-              <a:buChar char="•"/>
-            </a:pPr>
-            <a:r>
-              <a:rPr lang="en-US" sz="1050" dirty="0">
-                <a:solidFill>
-                  <a:srgbClr val="1F2328"/>
-                </a:solidFill>
-                <a:latin typeface="Segoe UI" pitchFamily="34" charset="0"/>
-                <a:ea typeface="Segoe UI" pitchFamily="34" charset="-122"/>
-                <a:cs typeface="Segoe UI" pitchFamily="34" charset="-120"/>
-              </a:rPr>
-              <a:t>Approve testimonials before they appear publicly</a:t>
-            </a:r>
-            <a:endParaRPr lang="en-US" sz="1050" dirty="0"/>
-          </a:p>
-        </p:txBody>
-      </p:sp>
-      <p:sp>
-        <p:nvSpPr>
-          <p:cNvPr id="15" name="Text 13"/>
+              <a:t>Approve testimonials</a:t>
+            </a:r>
+            <a:endParaRPr lang="en-US" sz="1350" dirty="0"/>
+          </a:p>
+        </p:txBody>
+      </p:sp>
+      <p:sp>
+        <p:nvSpPr>
+          <p:cNvPr id="14" name="Text 12"/>
           <p:cNvSpPr/>
           <p:nvPr/>
         </p:nvSpPr>
@@ -2095,7 +1990,7 @@
       </p:sp>
       <p:sp>
         <p:nvSpPr>
-          <p:cNvPr id="16" name="Text 14"/>
+          <p:cNvPr id="15" name="Text 13"/>
           <p:cNvSpPr/>
           <p:nvPr/>
         </p:nvSpPr>
@@ -2134,7 +2029,7 @@
       </p:sp>
       <p:sp>
         <p:nvSpPr>
-          <p:cNvPr id="17" name="Text 15"/>
+          <p:cNvPr id="16" name="Text 14"/>
           <p:cNvSpPr/>
           <p:nvPr/>
         </p:nvSpPr>
@@ -2387,12 +2282,12 @@
         </p:nvSpPr>
         <p:spPr>
           <a:xfrm>
-            <a:off x="566928" y="1883664"/>
-            <a:ext cx="5074920" cy="896112"/>
+            <a:off x="566928" y="1920240"/>
+            <a:ext cx="5074920" cy="914400"/>
           </a:xfrm>
           <a:prstGeom prst="roundRect">
             <a:avLst>
-              <a:gd name="adj" fmla="val 5102"/>
+              <a:gd name="adj" fmla="val 5000"/>
             </a:avLst>
           </a:prstGeom>
           <a:solidFill>
@@ -2414,8 +2309,8 @@
         </p:nvSpPr>
         <p:spPr>
           <a:xfrm>
-            <a:off x="786384" y="1883664"/>
-            <a:ext cx="4636008" cy="896112"/>
+            <a:off x="786384" y="1920240"/>
+            <a:ext cx="4636008" cy="914400"/>
           </a:xfrm>
           <a:prstGeom prst="rect">
             <a:avLst/>
@@ -2434,7 +2329,7 @@
               <a:buNone/>
             </a:pPr>
             <a:r>
-              <a:rPr lang="en-US" sz="1150" dirty="0">
+              <a:rPr lang="en-US" sz="1300" dirty="0">
                 <a:solidFill>
                   <a:srgbClr val="B01F1F"/>
                 </a:solidFill>
@@ -2442,9 +2337,9 @@
                 <a:ea typeface="Segoe UI" pitchFamily="34" charset="-122"/>
                 <a:cs typeface="Segoe UI" pitchFamily="34" charset="-120"/>
               </a:rPr>
-              <a:t>Listings scattered across Facebook groups and classifieds</a:t>
-            </a:r>
-            <a:endParaRPr lang="en-US" sz="1150" dirty="0"/>
+              <a:t>Listings scattered across Facebook and classifieds</a:t>
+            </a:r>
+            <a:endParaRPr lang="en-US" sz="1300" dirty="0"/>
           </a:p>
         </p:txBody>
       </p:sp>
@@ -2456,8 +2351,8 @@
         </p:nvSpPr>
         <p:spPr>
           <a:xfrm>
-            <a:off x="5660136" y="1883664"/>
-            <a:ext cx="237744" cy="896112"/>
+            <a:off x="5660136" y="1920240"/>
+            <a:ext cx="237744" cy="914400"/>
           </a:xfrm>
           <a:prstGeom prst="rect">
             <a:avLst/>
@@ -2495,12 +2390,12 @@
         </p:nvSpPr>
         <p:spPr>
           <a:xfrm>
-            <a:off x="5916168" y="1883664"/>
-            <a:ext cx="5715000" cy="896112"/>
+            <a:off x="5916168" y="1920240"/>
+            <a:ext cx="5715000" cy="914400"/>
           </a:xfrm>
           <a:prstGeom prst="roundRect">
             <a:avLst>
-              <a:gd name="adj" fmla="val 5102"/>
+              <a:gd name="adj" fmla="val 5000"/>
             </a:avLst>
           </a:prstGeom>
           <a:solidFill>
@@ -2522,8 +2417,8 @@
         </p:nvSpPr>
         <p:spPr>
           <a:xfrm>
-            <a:off x="6135624" y="1883664"/>
-            <a:ext cx="5276088" cy="896112"/>
+            <a:off x="6135624" y="1920240"/>
+            <a:ext cx="5276088" cy="914400"/>
           </a:xfrm>
           <a:prstGeom prst="rect">
             <a:avLst/>
@@ -2542,7 +2437,7 @@
               <a:buNone/>
             </a:pPr>
             <a:r>
-              <a:rPr lang="en-US" sz="1150" dirty="0">
+              <a:rPr lang="en-US" sz="1300" dirty="0">
                 <a:solidFill>
                   <a:srgbClr val="1F2328"/>
                 </a:solidFill>
@@ -2550,9 +2445,9 @@
                 <a:ea typeface="Segoe UI" pitchFamily="34" charset="-122"/>
                 <a:cs typeface="Segoe UI" pitchFamily="34" charset="-120"/>
               </a:rPr>
-              <a:t>One searchable catalogue with a consistent schema for every property</a:t>
-            </a:r>
-            <a:endParaRPr lang="en-US" sz="1150" dirty="0"/>
+              <a:t>One searchable catalogue</a:t>
+            </a:r>
+            <a:endParaRPr lang="en-US" sz="1300" dirty="0"/>
           </a:p>
         </p:txBody>
       </p:sp>
@@ -2564,12 +2459,12 @@
         </p:nvSpPr>
         <p:spPr>
           <a:xfrm>
-            <a:off x="566928" y="2944368"/>
-            <a:ext cx="5074920" cy="896112"/>
+            <a:off x="566928" y="3008376"/>
+            <a:ext cx="5074920" cy="914400"/>
           </a:xfrm>
           <a:prstGeom prst="roundRect">
             <a:avLst>
-              <a:gd name="adj" fmla="val 5102"/>
+              <a:gd name="adj" fmla="val 5000"/>
             </a:avLst>
           </a:prstGeom>
           <a:solidFill>
@@ -2591,8 +2486,8 @@
         </p:nvSpPr>
         <p:spPr>
           <a:xfrm>
-            <a:off x="786384" y="2944368"/>
-            <a:ext cx="4636008" cy="896112"/>
+            <a:off x="786384" y="3008376"/>
+            <a:ext cx="4636008" cy="914400"/>
           </a:xfrm>
           <a:prstGeom prst="rect">
             <a:avLst/>
@@ -2611,7 +2506,7 @@
               <a:buNone/>
             </a:pPr>
             <a:r>
-              <a:rPr lang="en-US" sz="1150" dirty="0">
+              <a:rPr lang="en-US" sz="1300" dirty="0">
                 <a:solidFill>
                   <a:srgbClr val="B01F1F"/>
                 </a:solidFill>
@@ -2619,9 +2514,9 @@
                 <a:ea typeface="Segoe UI" pitchFamily="34" charset="-122"/>
                 <a:cs typeface="Segoe UI" pitchFamily="34" charset="-120"/>
               </a:rPr>
-              <a:t>Dates agreed verbally, so properties get double-booked</a:t>
-            </a:r>
-            <a:endParaRPr lang="en-US" sz="1150" dirty="0"/>
+              <a:t>Dates agreed verbally, so properties double-book</a:t>
+            </a:r>
+            <a:endParaRPr lang="en-US" sz="1300" dirty="0"/>
           </a:p>
         </p:txBody>
       </p:sp>
@@ -2633,8 +2528,8 @@
         </p:nvSpPr>
         <p:spPr>
           <a:xfrm>
-            <a:off x="5660136" y="2944368"/>
-            <a:ext cx="237744" cy="896112"/>
+            <a:off x="5660136" y="3008376"/>
+            <a:ext cx="237744" cy="914400"/>
           </a:xfrm>
           <a:prstGeom prst="rect">
             <a:avLst/>
@@ -2672,12 +2567,12 @@
         </p:nvSpPr>
         <p:spPr>
           <a:xfrm>
-            <a:off x="5916168" y="2944368"/>
-            <a:ext cx="5715000" cy="896112"/>
+            <a:off x="5916168" y="3008376"/>
+            <a:ext cx="5715000" cy="914400"/>
           </a:xfrm>
           <a:prstGeom prst="roundRect">
             <a:avLst>
-              <a:gd name="adj" fmla="val 5102"/>
+              <a:gd name="adj" fmla="val 5000"/>
             </a:avLst>
           </a:prstGeom>
           <a:solidFill>
@@ -2699,8 +2594,8 @@
         </p:nvSpPr>
         <p:spPr>
           <a:xfrm>
-            <a:off x="6135624" y="2944368"/>
-            <a:ext cx="5276088" cy="896112"/>
+            <a:off x="6135624" y="3008376"/>
+            <a:ext cx="5276088" cy="914400"/>
           </a:xfrm>
           <a:prstGeom prst="rect">
             <a:avLst/>
@@ -2719,7 +2614,7 @@
               <a:buNone/>
             </a:pPr>
             <a:r>
-              <a:rPr lang="en-US" sz="1150" dirty="0">
+              <a:rPr lang="en-US" sz="1300" dirty="0">
                 <a:solidFill>
                   <a:srgbClr val="1F2328"/>
                 </a:solidFill>
@@ -2727,9 +2622,9 @@
                 <a:ea typeface="Segoe UI" pitchFamily="34" charset="-122"/>
                 <a:cs typeface="Segoe UI" pitchFamily="34" charset="-120"/>
               </a:rPr>
-              <a:t>The server rejects any overlapping range, and enforces turnover days between tenants</a:t>
-            </a:r>
-            <a:endParaRPr lang="en-US" sz="1150" dirty="0"/>
+              <a:t>The server refuses overlapping dates</a:t>
+            </a:r>
+            <a:endParaRPr lang="en-US" sz="1300" dirty="0"/>
           </a:p>
         </p:txBody>
       </p:sp>
@@ -2741,12 +2636,12 @@
         </p:nvSpPr>
         <p:spPr>
           <a:xfrm>
-            <a:off x="566928" y="4005072"/>
-            <a:ext cx="5074920" cy="896112"/>
+            <a:off x="566928" y="4096512"/>
+            <a:ext cx="5074920" cy="914400"/>
           </a:xfrm>
           <a:prstGeom prst="roundRect">
             <a:avLst>
-              <a:gd name="adj" fmla="val 5102"/>
+              <a:gd name="adj" fmla="val 5000"/>
             </a:avLst>
           </a:prstGeom>
           <a:solidFill>
@@ -2768,8 +2663,8 @@
         </p:nvSpPr>
         <p:spPr>
           <a:xfrm>
-            <a:off x="786384" y="4005072"/>
-            <a:ext cx="4636008" cy="896112"/>
+            <a:off x="786384" y="4096512"/>
+            <a:ext cx="4636008" cy="914400"/>
           </a:xfrm>
           <a:prstGeom prst="rect">
             <a:avLst/>
@@ -2788,7 +2683,7 @@
               <a:buNone/>
             </a:pPr>
             <a:r>
-              <a:rPr lang="en-US" sz="1150" dirty="0">
+              <a:rPr lang="en-US" sz="1300" dirty="0">
                 <a:solidFill>
                   <a:srgbClr val="B01F1F"/>
                 </a:solidFill>
@@ -2796,9 +2691,9 @@
                 <a:ea typeface="Segoe UI" pitchFamily="34" charset="-122"/>
                 <a:cs typeface="Segoe UI" pitchFamily="34" charset="-120"/>
               </a:rPr>
-              <a:t>Brokers take a month’s rent to make an introduction</a:t>
-            </a:r>
-            <a:endParaRPr lang="en-US" sz="1150" dirty="0"/>
+              <a:t>Brokers take a month’s rent</a:t>
+            </a:r>
+            <a:endParaRPr lang="en-US" sz="1300" dirty="0"/>
           </a:p>
         </p:txBody>
       </p:sp>
@@ -2810,8 +2705,8 @@
         </p:nvSpPr>
         <p:spPr>
           <a:xfrm>
-            <a:off x="5660136" y="4005072"/>
-            <a:ext cx="237744" cy="896112"/>
+            <a:off x="5660136" y="4096512"/>
+            <a:ext cx="237744" cy="914400"/>
           </a:xfrm>
           <a:prstGeom prst="rect">
             <a:avLst/>
@@ -2849,12 +2744,12 @@
         </p:nvSpPr>
         <p:spPr>
           <a:xfrm>
-            <a:off x="5916168" y="4005072"/>
-            <a:ext cx="5715000" cy="896112"/>
+            <a:off x="5916168" y="4096512"/>
+            <a:ext cx="5715000" cy="914400"/>
           </a:xfrm>
           <a:prstGeom prst="roundRect">
             <a:avLst>
-              <a:gd name="adj" fmla="val 5102"/>
+              <a:gd name="adj" fmla="val 5000"/>
             </a:avLst>
           </a:prstGeom>
           <a:solidFill>
@@ -2876,8 +2771,8 @@
         </p:nvSpPr>
         <p:spPr>
           <a:xfrm>
-            <a:off x="6135624" y="4005072"/>
-            <a:ext cx="5276088" cy="896112"/>
+            <a:off x="6135624" y="4096512"/>
+            <a:ext cx="5276088" cy="914400"/>
           </a:xfrm>
           <a:prstGeom prst="rect">
             <a:avLst/>
@@ -2896,7 +2791,7 @@
               <a:buNone/>
             </a:pPr>
             <a:r>
-              <a:rPr lang="en-US" sz="1150" dirty="0">
+              <a:rPr lang="en-US" sz="1300" dirty="0">
                 <a:solidFill>
                   <a:srgbClr val="1F2328"/>
                 </a:solidFill>
@@ -2904,9 +2799,9 @@
                 <a:ea typeface="Segoe UI" pitchFamily="34" charset="-122"/>
                 <a:cs typeface="Segoe UI" pitchFamily="34" charset="-120"/>
               </a:rPr>
-              <a:t>No commission. Owners pay a flat 20 JOD a month and deal with renters directly</a:t>
-            </a:r>
-            <a:endParaRPr lang="en-US" sz="1150" dirty="0"/>
+              <a:t>No commission — 20 JOD a month</a:t>
+            </a:r>
+            <a:endParaRPr lang="en-US" sz="1300" dirty="0"/>
           </a:p>
         </p:txBody>
       </p:sp>
@@ -2918,12 +2813,12 @@
         </p:nvSpPr>
         <p:spPr>
           <a:xfrm>
-            <a:off x="566928" y="5065776"/>
-            <a:ext cx="5074920" cy="896112"/>
+            <a:off x="566928" y="5184648"/>
+            <a:ext cx="5074920" cy="914400"/>
           </a:xfrm>
           <a:prstGeom prst="roundRect">
             <a:avLst>
-              <a:gd name="adj" fmla="val 5102"/>
+              <a:gd name="adj" fmla="val 5000"/>
             </a:avLst>
           </a:prstGeom>
           <a:solidFill>
@@ -2945,8 +2840,8 @@
         </p:nvSpPr>
         <p:spPr>
           <a:xfrm>
-            <a:off x="786384" y="5065776"/>
-            <a:ext cx="4636008" cy="896112"/>
+            <a:off x="786384" y="5184648"/>
+            <a:ext cx="4636008" cy="914400"/>
           </a:xfrm>
           <a:prstGeom prst="rect">
             <a:avLst/>
@@ -2965,7 +2860,7 @@
               <a:buNone/>
             </a:pPr>
             <a:r>
-              <a:rPr lang="en-US" sz="1150" dirty="0">
+              <a:rPr lang="en-US" sz="1300" dirty="0">
                 <a:solidFill>
                   <a:srgbClr val="B01F1F"/>
                 </a:solidFill>
@@ -2973,9 +2868,9 @@
                 <a:ea typeface="Segoe UI" pitchFamily="34" charset="-122"/>
                 <a:cs typeface="Segoe UI" pitchFamily="34" charset="-120"/>
               </a:rPr>
-              <a:t>The price shifts after both sides have agreed it</a:t>
-            </a:r>
-            <a:endParaRPr lang="en-US" sz="1150" dirty="0"/>
+              <a:t>The price moves after both sides agree</a:t>
+            </a:r>
+            <a:endParaRPr lang="en-US" sz="1300" dirty="0"/>
           </a:p>
         </p:txBody>
       </p:sp>
@@ -2987,8 +2882,8 @@
         </p:nvSpPr>
         <p:spPr>
           <a:xfrm>
-            <a:off x="5660136" y="5065776"/>
-            <a:ext cx="237744" cy="896112"/>
+            <a:off x="5660136" y="5184648"/>
+            <a:ext cx="237744" cy="914400"/>
           </a:xfrm>
           <a:prstGeom prst="rect">
             <a:avLst/>
@@ -3026,12 +2921,12 @@
         </p:nvSpPr>
         <p:spPr>
           <a:xfrm>
-            <a:off x="5916168" y="5065776"/>
-            <a:ext cx="5715000" cy="896112"/>
+            <a:off x="5916168" y="5184648"/>
+            <a:ext cx="5715000" cy="914400"/>
           </a:xfrm>
           <a:prstGeom prst="roundRect">
             <a:avLst>
-              <a:gd name="adj" fmla="val 5102"/>
+              <a:gd name="adj" fmla="val 5000"/>
             </a:avLst>
           </a:prstGeom>
           <a:solidFill>
@@ -3053,8 +2948,8 @@
         </p:nvSpPr>
         <p:spPr>
           <a:xfrm>
-            <a:off x="6135624" y="5065776"/>
-            <a:ext cx="5276088" cy="896112"/>
+            <a:off x="6135624" y="5184648"/>
+            <a:ext cx="5276088" cy="914400"/>
           </a:xfrm>
           <a:prstGeom prst="rect">
             <a:avLst/>
@@ -3073,7 +2968,7 @@
               <a:buNone/>
             </a:pPr>
             <a:r>
-              <a:rPr lang="en-US" sz="1150" dirty="0">
+              <a:rPr lang="en-US" sz="1300" dirty="0">
                 <a:solidFill>
                   <a:srgbClr val="1F2328"/>
                 </a:solidFill>
@@ -3081,9 +2976,9 @@
                 <a:ea typeface="Segoe UI" pitchFamily="34" charset="-122"/>
                 <a:cs typeface="Segoe UI" pitchFamily="34" charset="-120"/>
               </a:rPr>
-              <a:t>The total is snapshotted onto the booking, so a later price change cannot alter it</a:t>
-            </a:r>
-            <a:endParaRPr lang="en-US" sz="1150" dirty="0"/>
+              <a:t>The price is locked at booking</a:t>
+            </a:r>
+            <a:endParaRPr lang="en-US" sz="1300" dirty="0"/>
           </a:p>
         </p:txBody>
       </p:sp>
@@ -3384,13 +3279,13 @@
           <a:p>
             <a:pPr marL="139700" indent="-139700">
               <a:lnSpc>
-                <a:spcPct val="110000"/>
+                <a:spcPct val="122000"/>
               </a:lnSpc>
               <a:buSzPct val="100000"/>
               <a:buChar char="•"/>
             </a:pPr>
             <a:r>
-              <a:rPr lang="en-US" sz="820" dirty="0">
+              <a:rPr lang="en-US" sz="920" dirty="0">
                 <a:solidFill>
                   <a:srgbClr val="1F2328"/>
                 </a:solidFill>
@@ -3400,18 +3295,18 @@
               </a:rPr>
               <a:t>Property owners and small landlords</a:t>
             </a:r>
-            <a:endParaRPr lang="en-US" sz="820" dirty="0"/>
+            <a:endParaRPr lang="en-US" sz="920" dirty="0"/>
           </a:p>
           <a:p>
             <a:pPr marL="139700" indent="-139700">
               <a:lnSpc>
-                <a:spcPct val="110000"/>
+                <a:spcPct val="122000"/>
               </a:lnSpc>
               <a:buSzPct val="100000"/>
               <a:buChar char="•"/>
             </a:pPr>
             <a:r>
-              <a:rPr lang="en-US" sz="820" dirty="0">
+              <a:rPr lang="en-US" sz="920" dirty="0">
                 <a:solidFill>
                   <a:srgbClr val="1F2328"/>
                 </a:solidFill>
@@ -3419,20 +3314,20 @@
                 <a:ea typeface="Segoe UI" pitchFamily="34" charset="-122"/>
                 <a:cs typeface="Segoe UI" pitchFamily="34" charset="-120"/>
               </a:rPr>
-              <a:t>Hosting and SQL Server infrastructure</a:t>
-            </a:r>
-            <a:endParaRPr lang="en-US" sz="820" dirty="0"/>
+              <a:t>Hosting and SQL Server</a:t>
+            </a:r>
+            <a:endParaRPr lang="en-US" sz="920" dirty="0"/>
           </a:p>
           <a:p>
             <a:pPr marL="139700" indent="-139700">
               <a:lnSpc>
-                <a:spcPct val="110000"/>
+                <a:spcPct val="122000"/>
               </a:lnSpc>
               <a:buSzPct val="100000"/>
               <a:buChar char="•"/>
             </a:pPr>
             <a:r>
-              <a:rPr lang="en-US" sz="820" dirty="0">
+              <a:rPr lang="en-US" sz="920" dirty="0">
                 <a:solidFill>
                   <a:srgbClr val="1F2328"/>
                 </a:solidFill>
@@ -3440,20 +3335,20 @@
                 <a:ea typeface="Segoe UI" pitchFamily="34" charset="-122"/>
                 <a:cs typeface="Segoe UI" pitchFamily="34" charset="-120"/>
               </a:rPr>
-              <a:t>Orange Coding School (academic)</a:t>
-            </a:r>
-            <a:endParaRPr lang="en-US" sz="820" dirty="0"/>
+              <a:t>Orange Coding School</a:t>
+            </a:r>
+            <a:endParaRPr lang="en-US" sz="920" dirty="0"/>
           </a:p>
           <a:p>
             <a:pPr marL="139700" indent="-139700">
               <a:lnSpc>
-                <a:spcPct val="110000"/>
+                <a:spcPct val="122000"/>
               </a:lnSpc>
               <a:buSzPct val="100000"/>
               <a:buChar char="•"/>
             </a:pPr>
             <a:r>
-              <a:rPr lang="en-US" sz="820" dirty="0">
+              <a:rPr lang="en-US" sz="920" dirty="0">
                 <a:solidFill>
                   <a:srgbClr val="1F2328"/>
                 </a:solidFill>
@@ -3461,9 +3356,9 @@
                 <a:ea typeface="Segoe UI" pitchFamily="34" charset="-122"/>
                 <a:cs typeface="Segoe UI" pitchFamily="34" charset="-120"/>
               </a:rPr>
-              <a:t>Payment providers — future scope</a:t>
-            </a:r>
-            <a:endParaRPr lang="en-US" sz="820" dirty="0"/>
+              <a:t>Payment providers (future)</a:t>
+            </a:r>
+            <a:endParaRPr lang="en-US" sz="920" dirty="0"/>
           </a:p>
         </p:txBody>
       </p:sp>
@@ -3556,13 +3451,13 @@
           <a:p>
             <a:pPr marL="139700" indent="-139700">
               <a:lnSpc>
-                <a:spcPct val="110000"/>
+                <a:spcPct val="122000"/>
               </a:lnSpc>
               <a:buSzPct val="100000"/>
               <a:buChar char="•"/>
             </a:pPr>
             <a:r>
-              <a:rPr lang="en-US" sz="820" dirty="0">
+              <a:rPr lang="en-US" sz="920" dirty="0">
                 <a:solidFill>
                   <a:srgbClr val="1F2328"/>
                 </a:solidFill>
@@ -3572,18 +3467,18 @@
               </a:rPr>
               <a:t>Listing moderation</a:t>
             </a:r>
-            <a:endParaRPr lang="en-US" sz="820" dirty="0"/>
+            <a:endParaRPr lang="en-US" sz="920" dirty="0"/>
           </a:p>
           <a:p>
             <a:pPr marL="139700" indent="-139700">
               <a:lnSpc>
-                <a:spcPct val="110000"/>
+                <a:spcPct val="122000"/>
               </a:lnSpc>
               <a:buSzPct val="100000"/>
               <a:buChar char="•"/>
             </a:pPr>
             <a:r>
-              <a:rPr lang="en-US" sz="820" dirty="0">
+              <a:rPr lang="en-US" sz="920" dirty="0">
                 <a:solidFill>
                   <a:srgbClr val="1F2328"/>
                 </a:solidFill>
@@ -3591,20 +3486,20 @@
                 <a:ea typeface="Segoe UI" pitchFamily="34" charset="-122"/>
                 <a:cs typeface="Segoe UI" pitchFamily="34" charset="-120"/>
               </a:rPr>
-              <a:t>Booking-conflict enforcement</a:t>
-            </a:r>
-            <a:endParaRPr lang="en-US" sz="820" dirty="0"/>
+              <a:t>Conflict enforcement</a:t>
+            </a:r>
+            <a:endParaRPr lang="en-US" sz="920" dirty="0"/>
           </a:p>
           <a:p>
             <a:pPr marL="139700" indent="-139700">
               <a:lnSpc>
-                <a:spcPct val="110000"/>
+                <a:spcPct val="122000"/>
               </a:lnSpc>
               <a:buSzPct val="100000"/>
               <a:buChar char="•"/>
             </a:pPr>
             <a:r>
-              <a:rPr lang="en-US" sz="820" dirty="0">
+              <a:rPr lang="en-US" sz="920" dirty="0">
                 <a:solidFill>
                   <a:srgbClr val="1F2328"/>
                 </a:solidFill>
@@ -3614,7 +3509,7 @@
               </a:rPr>
               <a:t>Subscription verification</a:t>
             </a:r>
-            <a:endParaRPr lang="en-US" sz="820" dirty="0"/>
+            <a:endParaRPr lang="en-US" sz="920" dirty="0"/>
           </a:p>
         </p:txBody>
       </p:sp>
@@ -3707,13 +3602,13 @@
           <a:p>
             <a:pPr marL="139700" indent="-139700">
               <a:lnSpc>
-                <a:spcPct val="110000"/>
+                <a:spcPct val="122000"/>
               </a:lnSpc>
               <a:buSzPct val="100000"/>
               <a:buChar char="•"/>
             </a:pPr>
             <a:r>
-              <a:rPr lang="en-US" sz="820" dirty="0">
+              <a:rPr lang="en-US" sz="920" dirty="0">
                 <a:solidFill>
                   <a:srgbClr val="1F2328"/>
                 </a:solidFill>
@@ -3723,18 +3618,18 @@
               </a:rPr>
               <a:t>The platform itself</a:t>
             </a:r>
-            <a:endParaRPr lang="en-US" sz="820" dirty="0"/>
+            <a:endParaRPr lang="en-US" sz="920" dirty="0"/>
           </a:p>
           <a:p>
             <a:pPr marL="139700" indent="-139700">
               <a:lnSpc>
-                <a:spcPct val="110000"/>
+                <a:spcPct val="122000"/>
               </a:lnSpc>
               <a:buSzPct val="100000"/>
               <a:buChar char="•"/>
             </a:pPr>
             <a:r>
-              <a:rPr lang="en-US" sz="820" dirty="0">
+              <a:rPr lang="en-US" sz="920" dirty="0">
                 <a:solidFill>
                   <a:srgbClr val="1F2328"/>
                 </a:solidFill>
@@ -3744,18 +3639,18 @@
               </a:rPr>
               <a:t>Listing and booking records</a:t>
             </a:r>
-            <a:endParaRPr lang="en-US" sz="820" dirty="0"/>
+            <a:endParaRPr lang="en-US" sz="920" dirty="0"/>
           </a:p>
           <a:p>
             <a:pPr marL="139700" indent="-139700">
               <a:lnSpc>
-                <a:spcPct val="110000"/>
+                <a:spcPct val="122000"/>
               </a:lnSpc>
               <a:buSzPct val="100000"/>
               <a:buChar char="•"/>
             </a:pPr>
             <a:r>
-              <a:rPr lang="en-US" sz="820" dirty="0">
+              <a:rPr lang="en-US" sz="920" dirty="0">
                 <a:solidFill>
                   <a:srgbClr val="1F2328"/>
                 </a:solidFill>
@@ -3765,7 +3660,7 @@
               </a:rPr>
               <a:t>Subscribed owner base</a:t>
             </a:r>
-            <a:endParaRPr lang="en-US" sz="820" dirty="0"/>
+            <a:endParaRPr lang="en-US" sz="920" dirty="0"/>
           </a:p>
         </p:txBody>
       </p:sp>
@@ -3858,13 +3753,13 @@
           <a:p>
             <a:pPr marL="139700" indent="-139700">
               <a:lnSpc>
-                <a:spcPct val="110000"/>
+                <a:spcPct val="122000"/>
               </a:lnSpc>
               <a:buSzPct val="100000"/>
               <a:buChar char="•"/>
             </a:pPr>
             <a:r>
-              <a:rPr lang="en-US" sz="820" dirty="0">
+              <a:rPr lang="en-US" sz="920" dirty="0">
                 <a:solidFill>
                   <a:srgbClr val="1F2328"/>
                 </a:solidFill>
@@ -3872,20 +3767,20 @@
                 <a:ea typeface="Segoe UI" pitchFamily="34" charset="-122"/>
                 <a:cs typeface="Segoe UI" pitchFamily="34" charset="-120"/>
               </a:rPr>
-              <a:t>One structured catalogue, not scattered posts</a:t>
-            </a:r>
-            <a:endParaRPr lang="en-US" sz="820" dirty="0"/>
+              <a:t>One catalogue, not scattered posts</a:t>
+            </a:r>
+            <a:endParaRPr lang="en-US" sz="920" dirty="0"/>
           </a:p>
           <a:p>
             <a:pPr marL="139700" indent="-139700">
               <a:lnSpc>
-                <a:spcPct val="110000"/>
+                <a:spcPct val="122000"/>
               </a:lnSpc>
               <a:buSzPct val="100000"/>
               <a:buChar char="•"/>
             </a:pPr>
             <a:r>
-              <a:rPr lang="en-US" sz="820" dirty="0">
+              <a:rPr lang="en-US" sz="920" dirty="0">
                 <a:solidFill>
                   <a:srgbClr val="1F2328"/>
                 </a:solidFill>
@@ -3893,20 +3788,20 @@
                 <a:ea typeface="Segoe UI" pitchFamily="34" charset="-122"/>
                 <a:cs typeface="Segoe UI" pitchFamily="34" charset="-120"/>
               </a:rPr>
-              <a:t>Availability that cannot be double-booked</a:t>
-            </a:r>
-            <a:endParaRPr lang="en-US" sz="820" dirty="0"/>
+              <a:t>No double booking</a:t>
+            </a:r>
+            <a:endParaRPr lang="en-US" sz="920" dirty="0"/>
           </a:p>
           <a:p>
             <a:pPr marL="139700" indent="-139700">
               <a:lnSpc>
-                <a:spcPct val="110000"/>
+                <a:spcPct val="122000"/>
               </a:lnSpc>
               <a:buSzPct val="100000"/>
               <a:buChar char="•"/>
             </a:pPr>
             <a:r>
-              <a:rPr lang="en-US" sz="820" dirty="0">
+              <a:rPr lang="en-US" sz="920" dirty="0">
                 <a:solidFill>
                   <a:srgbClr val="1F2328"/>
                 </a:solidFill>
@@ -3914,20 +3809,20 @@
                 <a:ea typeface="Segoe UI" pitchFamily="34" charset="-122"/>
                 <a:cs typeface="Segoe UI" pitchFamily="34" charset="-120"/>
               </a:rPr>
-              <a:t>No commission — a flat 20 JOD a month</a:t>
-            </a:r>
-            <a:endParaRPr lang="en-US" sz="820" dirty="0"/>
+              <a:t>No commission — 20 JOD a month</a:t>
+            </a:r>
+            <a:endParaRPr lang="en-US" sz="920" dirty="0"/>
           </a:p>
           <a:p>
             <a:pPr marL="139700" indent="-139700">
               <a:lnSpc>
-                <a:spcPct val="110000"/>
+                <a:spcPct val="122000"/>
               </a:lnSpc>
               <a:buSzPct val="100000"/>
               <a:buChar char="•"/>
             </a:pPr>
             <a:r>
-              <a:rPr lang="en-US" sz="820" dirty="0">
+              <a:rPr lang="en-US" sz="920" dirty="0">
                 <a:solidFill>
                   <a:srgbClr val="1F2328"/>
                 </a:solidFill>
@@ -3935,20 +3830,20 @@
                 <a:ea typeface="Segoe UI" pitchFamily="34" charset="-122"/>
                 <a:cs typeface="Segoe UI" pitchFamily="34" charset="-120"/>
               </a:rPr>
-              <a:t>The agreed price is the price that stands</a:t>
-            </a:r>
-            <a:endParaRPr lang="en-US" sz="820" dirty="0"/>
+              <a:t>Price locked at booking</a:t>
+            </a:r>
+            <a:endParaRPr lang="en-US" sz="920" dirty="0"/>
           </a:p>
           <a:p>
             <a:pPr marL="139700" indent="-139700">
               <a:lnSpc>
-                <a:spcPct val="110000"/>
+                <a:spcPct val="122000"/>
               </a:lnSpc>
               <a:buSzPct val="100000"/>
               <a:buChar char="•"/>
             </a:pPr>
             <a:r>
-              <a:rPr lang="en-US" sz="820" dirty="0">
+              <a:rPr lang="en-US" sz="920" dirty="0">
                 <a:solidFill>
                   <a:srgbClr val="1F2328"/>
                 </a:solidFill>
@@ -3958,7 +3853,7 @@
               </a:rPr>
               <a:t>Owner and renter deal directly</a:t>
             </a:r>
-            <a:endParaRPr lang="en-US" sz="820" dirty="0"/>
+            <a:endParaRPr lang="en-US" sz="920" dirty="0"/>
           </a:p>
         </p:txBody>
       </p:sp>
@@ -4051,13 +3946,13 @@
           <a:p>
             <a:pPr marL="139700" indent="-139700">
               <a:lnSpc>
-                <a:spcPct val="110000"/>
+                <a:spcPct val="122000"/>
               </a:lnSpc>
               <a:buSzPct val="100000"/>
               <a:buChar char="•"/>
             </a:pPr>
             <a:r>
-              <a:rPr lang="en-US" sz="820" dirty="0">
+              <a:rPr lang="en-US" sz="920" dirty="0">
                 <a:solidFill>
                   <a:srgbClr val="1F2328"/>
                 </a:solidFill>
@@ -4067,18 +3962,18 @@
               </a:rPr>
               <a:t>Self-service web app</a:t>
             </a:r>
-            <a:endParaRPr lang="en-US" sz="820" dirty="0"/>
+            <a:endParaRPr lang="en-US" sz="920" dirty="0"/>
           </a:p>
           <a:p>
             <a:pPr marL="139700" indent="-139700">
               <a:lnSpc>
-                <a:spcPct val="110000"/>
+                <a:spcPct val="122000"/>
               </a:lnSpc>
               <a:buSzPct val="100000"/>
               <a:buChar char="•"/>
             </a:pPr>
             <a:r>
-              <a:rPr lang="en-US" sz="820" dirty="0">
+              <a:rPr lang="en-US" sz="920" dirty="0">
                 <a:solidFill>
                   <a:srgbClr val="1F2328"/>
                 </a:solidFill>
@@ -4088,18 +3983,18 @@
               </a:rPr>
               <a:t>Admin moderation and support</a:t>
             </a:r>
-            <a:endParaRPr lang="en-US" sz="820" dirty="0"/>
+            <a:endParaRPr lang="en-US" sz="920" dirty="0"/>
           </a:p>
           <a:p>
             <a:pPr marL="139700" indent="-139700">
               <a:lnSpc>
-                <a:spcPct val="110000"/>
+                <a:spcPct val="122000"/>
               </a:lnSpc>
               <a:buSzPct val="100000"/>
               <a:buChar char="•"/>
             </a:pPr>
             <a:r>
-              <a:rPr lang="en-US" sz="820" dirty="0">
+              <a:rPr lang="en-US" sz="920" dirty="0">
                 <a:solidFill>
                   <a:srgbClr val="1F2328"/>
                 </a:solidFill>
@@ -4109,7 +4004,7 @@
               </a:rPr>
               <a:t>Direct owner-to-renter contact</a:t>
             </a:r>
-            <a:endParaRPr lang="en-US" sz="820" dirty="0"/>
+            <a:endParaRPr lang="en-US" sz="920" dirty="0"/>
           </a:p>
         </p:txBody>
       </p:sp>
@@ -4202,13 +4097,13 @@
           <a:p>
             <a:pPr marL="139700" indent="-139700">
               <a:lnSpc>
-                <a:spcPct val="110000"/>
+                <a:spcPct val="122000"/>
               </a:lnSpc>
               <a:buSzPct val="100000"/>
               <a:buChar char="•"/>
             </a:pPr>
             <a:r>
-              <a:rPr lang="en-US" sz="820" dirty="0">
+              <a:rPr lang="en-US" sz="920" dirty="0">
                 <a:solidFill>
                   <a:srgbClr val="1F2328"/>
                 </a:solidFill>
@@ -4218,18 +4113,18 @@
               </a:rPr>
               <a:t>Responsive web application</a:t>
             </a:r>
-            <a:endParaRPr lang="en-US" sz="820" dirty="0"/>
+            <a:endParaRPr lang="en-US" sz="920" dirty="0"/>
           </a:p>
           <a:p>
             <a:pPr marL="139700" indent="-139700">
               <a:lnSpc>
-                <a:spcPct val="110000"/>
+                <a:spcPct val="122000"/>
               </a:lnSpc>
               <a:buSzPct val="100000"/>
               <a:buChar char="•"/>
             </a:pPr>
             <a:r>
-              <a:rPr lang="en-US" sz="820" dirty="0">
+              <a:rPr lang="en-US" sz="920" dirty="0">
                 <a:solidFill>
                   <a:srgbClr val="1F2328"/>
                 </a:solidFill>
@@ -4239,18 +4134,18 @@
               </a:rPr>
               <a:t>Search, filters and calendar</a:t>
             </a:r>
-            <a:endParaRPr lang="en-US" sz="820" dirty="0"/>
+            <a:endParaRPr lang="en-US" sz="920" dirty="0"/>
           </a:p>
           <a:p>
             <a:pPr marL="139700" indent="-139700">
               <a:lnSpc>
-                <a:spcPct val="110000"/>
+                <a:spcPct val="122000"/>
               </a:lnSpc>
               <a:buSzPct val="100000"/>
               <a:buChar char="•"/>
             </a:pPr>
             <a:r>
-              <a:rPr lang="en-US" sz="820" dirty="0">
+              <a:rPr lang="en-US" sz="920" dirty="0">
                 <a:solidFill>
                   <a:srgbClr val="1F2328"/>
                 </a:solidFill>
@@ -4260,7 +4155,7 @@
               </a:rPr>
               <a:t>Contact released on confirmation</a:t>
             </a:r>
-            <a:endParaRPr lang="en-US" sz="820" dirty="0"/>
+            <a:endParaRPr lang="en-US" sz="920" dirty="0"/>
           </a:p>
         </p:txBody>
       </p:sp>
@@ -4353,13 +4248,13 @@
           <a:p>
             <a:pPr marL="139700" indent="-139700">
               <a:lnSpc>
-                <a:spcPct val="110000"/>
+                <a:spcPct val="122000"/>
               </a:lnSpc>
               <a:buSzPct val="100000"/>
               <a:buChar char="•"/>
             </a:pPr>
             <a:r>
-              <a:rPr lang="en-US" sz="820" dirty="0">
+              <a:rPr lang="en-US" sz="920" dirty="0">
                 <a:solidFill>
                   <a:srgbClr val="1F2328"/>
                 </a:solidFill>
@@ -4367,20 +4262,20 @@
                 <a:ea typeface="Segoe UI" pitchFamily="34" charset="-122"/>
                 <a:cs typeface="Segoe UI" pitchFamily="34" charset="-120"/>
               </a:rPr>
-              <a:t>Renters — students, young professionals and families</a:t>
-            </a:r>
-            <a:endParaRPr lang="en-US" sz="820" dirty="0"/>
+              <a:t>Renters — students and families</a:t>
+            </a:r>
+            <a:endParaRPr lang="en-US" sz="920" dirty="0"/>
           </a:p>
           <a:p>
             <a:pPr marL="139700" indent="-139700">
               <a:lnSpc>
-                <a:spcPct val="110000"/>
+                <a:spcPct val="122000"/>
               </a:lnSpc>
               <a:buSzPct val="100000"/>
               <a:buChar char="•"/>
             </a:pPr>
             <a:r>
-              <a:rPr lang="en-US" sz="820" dirty="0">
+              <a:rPr lang="en-US" sz="920" dirty="0">
                 <a:solidFill>
                   <a:srgbClr val="1F2328"/>
                 </a:solidFill>
@@ -4388,20 +4283,20 @@
                 <a:ea typeface="Segoe UI" pitchFamily="34" charset="-122"/>
                 <a:cs typeface="Segoe UI" pitchFamily="34" charset="-120"/>
               </a:rPr>
-              <a:t>Owners — individuals with one to five properties</a:t>
-            </a:r>
-            <a:endParaRPr lang="en-US" sz="820" dirty="0"/>
+              <a:t>Owners — one to five properties</a:t>
+            </a:r>
+            <a:endParaRPr lang="en-US" sz="920" dirty="0"/>
           </a:p>
           <a:p>
             <a:pPr marL="139700" indent="-139700">
               <a:lnSpc>
-                <a:spcPct val="110000"/>
+                <a:spcPct val="122000"/>
               </a:lnSpc>
               <a:buSzPct val="100000"/>
               <a:buChar char="•"/>
             </a:pPr>
             <a:r>
-              <a:rPr lang="en-US" sz="820" dirty="0">
+              <a:rPr lang="en-US" sz="920" dirty="0">
                 <a:solidFill>
                   <a:srgbClr val="1F2328"/>
                 </a:solidFill>
@@ -4409,20 +4304,20 @@
                 <a:ea typeface="Segoe UI" pitchFamily="34" charset="-122"/>
                 <a:cs typeface="Segoe UI" pitchFamily="34" charset="-120"/>
               </a:rPr>
-              <a:t>One account can be both, in different transactions</a:t>
-            </a:r>
-            <a:endParaRPr lang="en-US" sz="820" dirty="0"/>
+              <a:t>One account can be both</a:t>
+            </a:r>
+            <a:endParaRPr lang="en-US" sz="920" dirty="0"/>
           </a:p>
           <a:p>
             <a:pPr marL="139700" indent="-139700">
               <a:lnSpc>
-                <a:spcPct val="110000"/>
+                <a:spcPct val="122000"/>
               </a:lnSpc>
               <a:buSzPct val="100000"/>
               <a:buChar char="•"/>
             </a:pPr>
             <a:r>
-              <a:rPr lang="en-US" sz="820" dirty="0">
+              <a:rPr lang="en-US" sz="920" dirty="0">
                 <a:solidFill>
                   <a:srgbClr val="1F2328"/>
                 </a:solidFill>
@@ -4430,9 +4325,9 @@
                 <a:ea typeface="Segoe UI" pitchFamily="34" charset="-122"/>
                 <a:cs typeface="Segoe UI" pitchFamily="34" charset="-120"/>
               </a:rPr>
-              <a:t>Administrators — internal operators</a:t>
-            </a:r>
-            <a:endParaRPr lang="en-US" sz="820" dirty="0"/>
+              <a:t>Admins — internal</a:t>
+            </a:r>
+            <a:endParaRPr lang="en-US" sz="920" dirty="0"/>
           </a:p>
         </p:txBody>
       </p:sp>
@@ -4525,13 +4420,13 @@
           <a:p>
             <a:pPr marL="139700" indent="-139700">
               <a:lnSpc>
-                <a:spcPct val="110000"/>
+                <a:spcPct val="122000"/>
               </a:lnSpc>
               <a:buSzPct val="100000"/>
               <a:buChar char="•"/>
             </a:pPr>
             <a:r>
-              <a:rPr lang="en-US" sz="820" dirty="0">
+              <a:rPr lang="en-US" sz="920" dirty="0">
                 <a:solidFill>
                   <a:srgbClr val="1F2328"/>
                 </a:solidFill>
@@ -4539,20 +4434,20 @@
                 <a:ea typeface="Segoe UI" pitchFamily="34" charset="-122"/>
                 <a:cs typeface="Segoe UI" pitchFamily="34" charset="-120"/>
               </a:rPr>
-              <a:t>Hosting, database and image storage</a:t>
-            </a:r>
-            <a:endParaRPr lang="en-US" sz="820" dirty="0"/>
+              <a:t>Hosting, database, image storage</a:t>
+            </a:r>
+            <a:endParaRPr lang="en-US" sz="920" dirty="0"/>
           </a:p>
           <a:p>
             <a:pPr marL="139700" indent="-139700">
               <a:lnSpc>
-                <a:spcPct val="110000"/>
+                <a:spcPct val="122000"/>
               </a:lnSpc>
               <a:buSzPct val="100000"/>
               <a:buChar char="•"/>
             </a:pPr>
             <a:r>
-              <a:rPr lang="en-US" sz="820" dirty="0">
+              <a:rPr lang="en-US" sz="920" dirty="0">
                 <a:solidFill>
                   <a:srgbClr val="1F2328"/>
                 </a:solidFill>
@@ -4560,20 +4455,20 @@
                 <a:ea typeface="Segoe UI" pitchFamily="34" charset="-122"/>
                 <a:cs typeface="Segoe UI" pitchFamily="34" charset="-120"/>
               </a:rPr>
-              <a:t>Development and ongoing maintenance</a:t>
-            </a:r>
-            <a:endParaRPr lang="en-US" sz="820" dirty="0"/>
+              <a:t>Development and maintenance</a:t>
+            </a:r>
+            <a:endParaRPr lang="en-US" sz="920" dirty="0"/>
           </a:p>
           <a:p>
             <a:pPr marL="139700" indent="-139700">
               <a:lnSpc>
-                <a:spcPct val="110000"/>
+                <a:spcPct val="122000"/>
               </a:lnSpc>
               <a:buSzPct val="100000"/>
               <a:buChar char="•"/>
             </a:pPr>
             <a:r>
-              <a:rPr lang="en-US" sz="820" dirty="0">
+              <a:rPr lang="en-US" sz="920" dirty="0">
                 <a:solidFill>
                   <a:srgbClr val="1F2328"/>
                 </a:solidFill>
@@ -4581,9 +4476,9 @@
                 <a:ea typeface="Segoe UI" pitchFamily="34" charset="-122"/>
                 <a:cs typeface="Segoe UI" pitchFamily="34" charset="-120"/>
               </a:rPr>
-              <a:t>Moderation and support time</a:t>
-            </a:r>
-            <a:endParaRPr lang="en-US" sz="820" dirty="0"/>
+              <a:t>Moderation and support</a:t>
+            </a:r>
+            <a:endParaRPr lang="en-US" sz="920" dirty="0"/>
           </a:p>
         </p:txBody>
       </p:sp>
@@ -4676,13 +4571,13 @@
           <a:p>
             <a:pPr marL="139700" indent="-139700">
               <a:lnSpc>
-                <a:spcPct val="110000"/>
+                <a:spcPct val="122000"/>
               </a:lnSpc>
               <a:buSzPct val="100000"/>
               <a:buChar char="•"/>
             </a:pPr>
             <a:r>
-              <a:rPr lang="en-US" sz="820" dirty="0">
+              <a:rPr lang="en-US" sz="920" dirty="0">
                 <a:solidFill>
                   <a:srgbClr val="1F2328"/>
                 </a:solidFill>
@@ -4690,20 +4585,20 @@
                 <a:ea typeface="Segoe UI" pitchFamily="34" charset="-122"/>
                 <a:cs typeface="Segoe UI" pitchFamily="34" charset="-120"/>
               </a:rPr>
-              <a:t>Owner subscriptions — 20 JOD per month, the only revenue today</a:t>
-            </a:r>
-            <a:endParaRPr lang="en-US" sz="820" dirty="0"/>
+              <a:t>Owner subscriptions — 20 JOD a month (only revenue today)</a:t>
+            </a:r>
+            <a:endParaRPr lang="en-US" sz="920" dirty="0"/>
           </a:p>
           <a:p>
             <a:pPr marL="139700" indent="-139700">
               <a:lnSpc>
-                <a:spcPct val="110000"/>
+                <a:spcPct val="122000"/>
               </a:lnSpc>
               <a:buSzPct val="100000"/>
               <a:buChar char="•"/>
             </a:pPr>
             <a:r>
-              <a:rPr lang="en-US" sz="820" dirty="0">
+              <a:rPr lang="en-US" sz="920" dirty="0">
                 <a:solidFill>
                   <a:srgbClr val="1F2328"/>
                 </a:solidFill>
@@ -4711,20 +4606,20 @@
                 <a:ea typeface="Segoe UI" pitchFamily="34" charset="-122"/>
                 <a:cs typeface="Segoe UI" pitchFamily="34" charset="-120"/>
               </a:rPr>
-              <a:t>Zero commission on bookings, by design</a:t>
-            </a:r>
-            <a:endParaRPr lang="en-US" sz="820" dirty="0"/>
+              <a:t>Zero commission on bookings</a:t>
+            </a:r>
+            <a:endParaRPr lang="en-US" sz="920" dirty="0"/>
           </a:p>
           <a:p>
             <a:pPr marL="139700" indent="-139700">
               <a:lnSpc>
-                <a:spcPct val="110000"/>
+                <a:spcPct val="122000"/>
               </a:lnSpc>
               <a:buSzPct val="100000"/>
               <a:buChar char="•"/>
             </a:pPr>
             <a:r>
-              <a:rPr lang="en-US" sz="820" dirty="0">
+              <a:rPr lang="en-US" sz="920" dirty="0">
                 <a:solidFill>
                   <a:srgbClr val="1F2328"/>
                 </a:solidFill>
@@ -4732,9 +4627,9 @@
                 <a:ea typeface="Segoe UI" pitchFamily="34" charset="-122"/>
                 <a:cs typeface="Segoe UI" pitchFamily="34" charset="-120"/>
               </a:rPr>
-              <a:t>Featured or promoted listings — potential future stream</a:t>
-            </a:r>
-            <a:endParaRPr lang="en-US" sz="820" dirty="0"/>
+              <a:t>Featured listings (future)</a:t>
+            </a:r>
+            <a:endParaRPr lang="en-US" sz="920" dirty="0"/>
           </a:p>
         </p:txBody>
       </p:sp>
